--- a/第2章-函数与模块化编程/第2章-函数与模块化编程.pptx
+++ b/第2章-函数与模块化编程/第2章-函数与模块化编程.pptx
@@ -6,10 +6,10 @@
     <p:sldMasterId id="2147484986" r:id="rId2"/>
   </p:sldMasterIdLst>
   <p:notesMasterIdLst>
-    <p:notesMasterId r:id="rId29"/>
+    <p:notesMasterId r:id="rId28"/>
   </p:notesMasterIdLst>
   <p:handoutMasterIdLst>
-    <p:handoutMasterId r:id="rId30"/>
+    <p:handoutMasterId r:id="rId29"/>
   </p:handoutMasterIdLst>
   <p:sldIdLst>
     <p:sldId id="2708" r:id="rId3"/>
@@ -36,13 +36,12 @@
     <p:sldId id="2791" r:id="rId24"/>
     <p:sldId id="2792" r:id="rId25"/>
     <p:sldId id="2793" r:id="rId26"/>
-    <p:sldId id="2741" r:id="rId27"/>
-    <p:sldId id="2788" r:id="rId28"/>
+    <p:sldId id="2794" r:id="rId27"/>
   </p:sldIdLst>
   <p:sldSz cx="12192000" cy="6858000"/>
   <p:notesSz cx="7099300" cy="10234613"/>
   <p:custDataLst>
-    <p:tags r:id="rId31"/>
+    <p:tags r:id="rId30"/>
   </p:custDataLst>
   <p:defaultTextStyle>
     <a:defPPr>
@@ -897,7 +896,7 @@
               </a14:hiddenFill>
             </a:ext>
             <a:ext uri="{FAA26D3D-D897-4be2-8F04-BA451C77F1D7}">
-              <ma14:placeholderFlag xmlns:ma14="http://schemas.microsoft.com/office/mac/drawingml/2011/main" xmlns="" val="1"/>
+              <ma14:placeholderFlag xmlns="" xmlns:ma14="http://schemas.microsoft.com/office/mac/drawingml/2011/main" val="1"/>
             </a:ext>
           </a:extLst>
         </p:spPr>
@@ -1285,7 +1284,7 @@
               </a14:hiddenLine>
             </a:ext>
             <a:ext uri="{FAA26D3D-D897-4be2-8F04-BA451C77F1D7}">
-              <ma14:placeholderFlag xmlns:ma14="http://schemas.microsoft.com/office/mac/drawingml/2011/main" xmlns="" val="1"/>
+              <ma14:placeholderFlag xmlns="" xmlns:ma14="http://schemas.microsoft.com/office/mac/drawingml/2011/main" val="1"/>
             </a:ext>
           </a:extLst>
         </p:spPr>
@@ -2029,7 +2028,7 @@
           <a:bodyPr/>
           <a:lstStyle/>
           <a:p>
-            <a:endParaRPr lang="zh-CN" altLang="en-US"/>
+            <a:endParaRPr lang="zh-CN" altLang="en-US" dirty="0"/>
           </a:p>
         </p:txBody>
       </p:sp>
@@ -2653,71 +2652,10 @@
   <p:cSld>
     <p:spTree>
       <p:nvGrpSpPr>
-        <p:cNvPr id="1" name=""/>
-        <p:cNvGrpSpPr/>
-        <p:nvPr/>
-      </p:nvGrpSpPr>
-      <p:grpSpPr>
-        <a:xfrm>
-          <a:off x="0" y="0"/>
-          <a:ext cx="0" cy="0"/>
-          <a:chOff x="0" y="0"/>
-          <a:chExt cx="0" cy="0"/>
-        </a:xfrm>
-      </p:grpSpPr>
-      <p:sp>
-        <p:nvSpPr>
-          <p:cNvPr id="2" name="幻灯片图像占位符 1"/>
-          <p:cNvSpPr>
-            <a:spLocks noGrp="1" noRot="1" noChangeAspect="1"/>
-          </p:cNvSpPr>
-          <p:nvPr>
-            <p:ph type="sldImg"/>
-          </p:nvPr>
-        </p:nvSpPr>
-        <p:spPr/>
-      </p:sp>
-      <p:sp>
-        <p:nvSpPr>
-          <p:cNvPr id="3" name="备注占位符 2"/>
-          <p:cNvSpPr>
-            <a:spLocks noGrp="1"/>
-          </p:cNvSpPr>
-          <p:nvPr>
-            <p:ph type="body" idx="1"/>
-          </p:nvPr>
-        </p:nvSpPr>
-        <p:spPr/>
-        <p:txBody>
-          <a:bodyPr/>
-          <a:lstStyle/>
-          <a:p>
-            <a:endParaRPr lang="zh-CN" altLang="en-US" dirty="0"/>
-          </a:p>
-        </p:txBody>
-      </p:sp>
-    </p:spTree>
-    <p:extLst>
-      <p:ext uri="{BB962C8B-B14F-4D97-AF65-F5344CB8AC3E}">
-        <p14:creationId xmlns:p14="http://schemas.microsoft.com/office/powerpoint/2010/main" val="3363326210"/>
-      </p:ext>
-    </p:extLst>
-  </p:cSld>
-  <p:clrMapOvr>
-    <a:masterClrMapping/>
-  </p:clrMapOvr>
-</p:notes>
-</file>
-
-<file path=ppt/notesSlides/notesSlide26.xml><?xml version="1.0" encoding="utf-8"?>
-<p:notes xmlns:a="http://schemas.openxmlformats.org/drawingml/2006/main" xmlns:r="http://schemas.openxmlformats.org/officeDocument/2006/relationships" xmlns:p="http://schemas.openxmlformats.org/presentationml/2006/main">
-  <p:cSld>
-    <p:spTree>
-      <p:nvGrpSpPr>
         <p:cNvPr id="1" name="">
           <a:extLst>
             <a:ext uri="{FF2B5EF4-FFF2-40B4-BE49-F238E27FC236}">
-              <a16:creationId xmlns:a16="http://schemas.microsoft.com/office/drawing/2014/main" id="{69A174D8-6A28-C8E3-1C21-02AFB0809CE4}"/>
+              <a16:creationId xmlns:a16="http://schemas.microsoft.com/office/drawing/2014/main" id="{76E57837-686D-382B-C220-D5CC2B66CFED}"/>
             </a:ext>
           </a:extLst>
         </p:cNvPr>
@@ -2737,7 +2675,7 @@
           <p:cNvPr id="2" name="幻灯片图像占位符 1">
             <a:extLst>
               <a:ext uri="{FF2B5EF4-FFF2-40B4-BE49-F238E27FC236}">
-                <a16:creationId xmlns:a16="http://schemas.microsoft.com/office/drawing/2014/main" id="{F6897E9F-012B-C372-40C0-176255E5E205}"/>
+                <a16:creationId xmlns:a16="http://schemas.microsoft.com/office/drawing/2014/main" id="{E0664AE5-F3FE-7EB6-838B-EFE00358EAE6}"/>
               </a:ext>
             </a:extLst>
           </p:cNvPr>
@@ -2755,7 +2693,7 @@
           <p:cNvPr id="3" name="备注占位符 2">
             <a:extLst>
               <a:ext uri="{FF2B5EF4-FFF2-40B4-BE49-F238E27FC236}">
-                <a16:creationId xmlns:a16="http://schemas.microsoft.com/office/drawing/2014/main" id="{01EB4E98-EF28-6EE4-04E1-2BD7E0634152}"/>
+                <a16:creationId xmlns:a16="http://schemas.microsoft.com/office/drawing/2014/main" id="{2420367B-4A39-8011-B181-B8040FE85BE7}"/>
               </a:ext>
             </a:extLst>
           </p:cNvPr>
@@ -2778,7 +2716,7 @@
     </p:spTree>
     <p:extLst>
       <p:ext uri="{BB962C8B-B14F-4D97-AF65-F5344CB8AC3E}">
-        <p14:creationId xmlns:p14="http://schemas.microsoft.com/office/powerpoint/2010/main" val="629363749"/>
+        <p14:creationId xmlns:p14="http://schemas.microsoft.com/office/powerpoint/2010/main" val="3068890454"/>
       </p:ext>
     </p:extLst>
   </p:cSld>
@@ -5204,7 +5142,7 @@
               </a14:hiddenLine>
             </a:ext>
             <a:ext uri="{FAA26D3D-D897-4be2-8F04-BA451C77F1D7}">
-              <ma14:placeholderFlag xmlns:ma14="http://schemas.microsoft.com/office/mac/drawingml/2011/main" xmlns="" val="1"/>
+              <ma14:placeholderFlag xmlns="" xmlns:ma14="http://schemas.microsoft.com/office/mac/drawingml/2011/main" val="1"/>
             </a:ext>
           </a:extLst>
         </p:spPr>
@@ -8900,7 +8838,7 @@
               </a14:hiddenLine>
             </a:ext>
             <a:ext uri="{FAA26D3D-D897-4be2-8F04-BA451C77F1D7}">
-              <ma14:placeholderFlag xmlns:ma14="http://schemas.microsoft.com/office/mac/drawingml/2011/main" xmlns="" val="1"/>
+              <ma14:placeholderFlag xmlns="" xmlns:ma14="http://schemas.microsoft.com/office/mac/drawingml/2011/main" val="1"/>
             </a:ext>
           </a:extLst>
         </p:spPr>
@@ -17254,8 +17192,8 @@
         </p:nvSpPr>
         <p:spPr>
           <a:xfrm>
-            <a:off x="341088" y="4501565"/>
-            <a:ext cx="3584304" cy="1600438"/>
+            <a:off x="542924" y="4501565"/>
+            <a:ext cx="3252097" cy="1600438"/>
           </a:xfrm>
           <a:prstGeom prst="rect">
             <a:avLst/>
@@ -19100,8 +19038,8 @@
         </p:nvSpPr>
         <p:spPr>
           <a:xfrm>
-            <a:off x="611712" y="1631755"/>
-            <a:ext cx="11275488" cy="2170594"/>
+            <a:off x="631375" y="1631755"/>
+            <a:ext cx="11263085" cy="2170594"/>
           </a:xfrm>
           <a:prstGeom prst="rect">
             <a:avLst/>
@@ -19291,7 +19229,7 @@
         </p:nvSpPr>
         <p:spPr>
           <a:xfrm>
-            <a:off x="2561001" y="3228988"/>
+            <a:off x="2561001" y="3366871"/>
             <a:ext cx="9584700" cy="3351046"/>
           </a:xfrm>
           <a:prstGeom prst="rect">
@@ -21009,8 +20947,8 @@
         </p:nvSpPr>
         <p:spPr>
           <a:xfrm>
-            <a:off x="611712" y="4493935"/>
-            <a:ext cx="2200877" cy="954107"/>
+            <a:off x="522513" y="4392335"/>
+            <a:ext cx="1872344" cy="954107"/>
           </a:xfrm>
           <a:prstGeom prst="rect">
             <a:avLst/>
@@ -21520,761 +21458,10 @@
   <p:cSld>
     <p:spTree>
       <p:nvGrpSpPr>
-        <p:cNvPr id="1" name=""/>
-        <p:cNvGrpSpPr/>
-        <p:nvPr/>
-      </p:nvGrpSpPr>
-      <p:grpSpPr>
-        <a:xfrm>
-          <a:off x="0" y="0"/>
-          <a:ext cx="0" cy="0"/>
-          <a:chOff x="0" y="0"/>
-          <a:chExt cx="0" cy="0"/>
-        </a:xfrm>
-      </p:grpSpPr>
-      <p:sp>
-        <p:nvSpPr>
-          <p:cNvPr id="3" name="标题 2"/>
-          <p:cNvSpPr>
-            <a:spLocks noGrp="1"/>
-          </p:cNvSpPr>
-          <p:nvPr>
-            <p:ph type="title"/>
-          </p:nvPr>
-        </p:nvSpPr>
-        <p:spPr>
-          <a:xfrm>
-            <a:off x="1" y="8526"/>
-            <a:ext cx="10537372" cy="792162"/>
-          </a:xfrm>
-        </p:spPr>
-        <p:txBody>
-          <a:bodyPr/>
-          <a:lstStyle/>
-          <a:p>
-            <a:r>
-              <a:rPr lang="zh-CN" altLang="en-US" sz="4000" dirty="0">
-                <a:latin typeface="+mn-ea"/>
-              </a:rPr>
-              <a:t>第</a:t>
-            </a:r>
-            <a:r>
-              <a:rPr lang="en-US" altLang="zh-CN" sz="4000" dirty="0">
-                <a:latin typeface="+mn-ea"/>
-              </a:rPr>
-              <a:t>4</a:t>
-            </a:r>
-            <a:r>
-              <a:rPr lang="zh-CN" altLang="en-US" sz="4000" dirty="0">
-                <a:latin typeface="+mn-ea"/>
-              </a:rPr>
-              <a:t>章、函数与模块化编程</a:t>
-            </a:r>
-            <a:endParaRPr lang="zh-CN" altLang="en-US" sz="4000" dirty="0"/>
-          </a:p>
-        </p:txBody>
-      </p:sp>
-      <p:sp>
-        <p:nvSpPr>
-          <p:cNvPr id="4" name="TextBox 10">
-            <a:extLst>
-              <a:ext uri="{FF2B5EF4-FFF2-40B4-BE49-F238E27FC236}">
-                <a16:creationId xmlns:a16="http://schemas.microsoft.com/office/drawing/2014/main" id="{DBE2EB52-1153-547D-4DDB-F105FCA1059C}"/>
-              </a:ext>
-            </a:extLst>
-          </p:cNvPr>
-          <p:cNvSpPr txBox="1"/>
-          <p:nvPr/>
-        </p:nvSpPr>
-        <p:spPr>
-          <a:xfrm>
-            <a:off x="442687" y="908405"/>
-            <a:ext cx="6654800" cy="743986"/>
-          </a:xfrm>
-          <a:prstGeom prst="rect">
-            <a:avLst/>
-          </a:prstGeom>
-          <a:noFill/>
-        </p:spPr>
-        <p:txBody>
-          <a:bodyPr wrap="square" rtlCol="0">
-            <a:spAutoFit/>
-          </a:bodyPr>
-          <a:lstStyle/>
-          <a:p>
-            <a:pPr algn="just">
-              <a:lnSpc>
-                <a:spcPct val="150000"/>
-              </a:lnSpc>
-            </a:pPr>
-            <a:r>
-              <a:rPr lang="zh-CN" altLang="en-US" sz="3200" b="1" dirty="0">
-                <a:solidFill>
-                  <a:srgbClr val="333333"/>
-                </a:solidFill>
-                <a:latin typeface="+mn-ea"/>
-                <a:ea typeface="+mn-ea"/>
-              </a:rPr>
-              <a:t>章节实验</a:t>
-            </a:r>
-            <a:r>
-              <a:rPr lang="en-US" altLang="zh-CN" sz="3200" b="1" dirty="0">
-                <a:solidFill>
-                  <a:srgbClr val="333333"/>
-                </a:solidFill>
-                <a:latin typeface="+mn-ea"/>
-                <a:ea typeface="+mn-ea"/>
-              </a:rPr>
-              <a:t>1-</a:t>
-            </a:r>
-            <a:r>
-              <a:rPr lang="zh-CN" altLang="en-US" sz="3200" b="1" dirty="0">
-                <a:solidFill>
-                  <a:srgbClr val="333333"/>
-                </a:solidFill>
-                <a:latin typeface="+mn-ea"/>
-                <a:ea typeface="+mn-ea"/>
-              </a:rPr>
-              <a:t>创建函数、模块和包</a:t>
-            </a:r>
-            <a:endParaRPr lang="en-US" altLang="zh-CN" sz="3200" b="1" dirty="0">
-              <a:solidFill>
-                <a:srgbClr val="333333"/>
-              </a:solidFill>
-              <a:latin typeface="+mn-ea"/>
-              <a:ea typeface="+mn-ea"/>
-            </a:endParaRPr>
-          </a:p>
-        </p:txBody>
-      </p:sp>
-      <p:sp>
-        <p:nvSpPr>
-          <p:cNvPr id="6" name="TextBox 12">
-            <a:extLst>
-              <a:ext uri="{FF2B5EF4-FFF2-40B4-BE49-F238E27FC236}">
-                <a16:creationId xmlns:a16="http://schemas.microsoft.com/office/drawing/2014/main" id="{68615743-0F76-1E7B-8513-381292D6BC62}"/>
-              </a:ext>
-            </a:extLst>
-          </p:cNvPr>
-          <p:cNvSpPr txBox="1"/>
-          <p:nvPr/>
-        </p:nvSpPr>
-        <p:spPr>
-          <a:xfrm>
-            <a:off x="377373" y="1652391"/>
-            <a:ext cx="11611428" cy="4847481"/>
-          </a:xfrm>
-          <a:prstGeom prst="rect">
-            <a:avLst/>
-          </a:prstGeom>
-          <a:noFill/>
-        </p:spPr>
-        <p:txBody>
-          <a:bodyPr wrap="square">
-            <a:spAutoFit/>
-          </a:bodyPr>
-          <a:lstStyle/>
-          <a:p>
-            <a:pPr algn="just"/>
-            <a:r>
-              <a:rPr lang="zh-CN" altLang="en-US" sz="3000" b="1" dirty="0">
-                <a:solidFill>
-                  <a:srgbClr val="FF0000"/>
-                </a:solidFill>
-                <a:latin typeface="Times New Roman" panose="02020603050405020304" pitchFamily="18" charset="0"/>
-                <a:ea typeface="+mn-ea"/>
-                <a:cs typeface="Times New Roman" panose="02020603050405020304" pitchFamily="18" charset="0"/>
-              </a:rPr>
-              <a:t>实验目标：</a:t>
-            </a:r>
-            <a:endParaRPr lang="en-US" altLang="zh-CN" sz="3000" b="1" dirty="0">
-              <a:solidFill>
-                <a:srgbClr val="FF0000"/>
-              </a:solidFill>
-              <a:latin typeface="Times New Roman" panose="02020603050405020304" pitchFamily="18" charset="0"/>
-              <a:ea typeface="+mn-ea"/>
-              <a:cs typeface="Times New Roman" panose="02020603050405020304" pitchFamily="18" charset="0"/>
-            </a:endParaRPr>
-          </a:p>
-          <a:p>
-            <a:pPr algn="just"/>
-            <a:r>
-              <a:rPr lang="zh-CN" altLang="en-US" sz="2600" dirty="0">
-                <a:solidFill>
-                  <a:schemeClr val="bg2"/>
-                </a:solidFill>
-                <a:latin typeface="Times New Roman" panose="02020603050405020304" pitchFamily="18" charset="0"/>
-                <a:ea typeface="+mn-ea"/>
-                <a:cs typeface="Times New Roman" panose="02020603050405020304" pitchFamily="18" charset="0"/>
-              </a:rPr>
-              <a:t>掌握</a:t>
-            </a:r>
-            <a:r>
-              <a:rPr lang="en-US" altLang="zh-CN" sz="2600" dirty="0">
-                <a:solidFill>
-                  <a:schemeClr val="bg2"/>
-                </a:solidFill>
-                <a:latin typeface="Times New Roman" panose="02020603050405020304" pitchFamily="18" charset="0"/>
-                <a:ea typeface="+mn-ea"/>
-                <a:cs typeface="Times New Roman" panose="02020603050405020304" pitchFamily="18" charset="0"/>
-              </a:rPr>
-              <a:t>Python</a:t>
-            </a:r>
-            <a:r>
-              <a:rPr lang="zh-CN" altLang="en-US" sz="2600" dirty="0">
-                <a:solidFill>
-                  <a:schemeClr val="bg2"/>
-                </a:solidFill>
-                <a:latin typeface="Times New Roman" panose="02020603050405020304" pitchFamily="18" charset="0"/>
-                <a:ea typeface="+mn-ea"/>
-                <a:cs typeface="Times New Roman" panose="02020603050405020304" pitchFamily="18" charset="0"/>
-              </a:rPr>
-              <a:t>编程函数、模块和包的创建与使用</a:t>
-            </a:r>
-            <a:endParaRPr lang="en-US" altLang="zh-CN" sz="2600" dirty="0">
-              <a:solidFill>
-                <a:schemeClr val="bg2"/>
-              </a:solidFill>
-              <a:latin typeface="Times New Roman" panose="02020603050405020304" pitchFamily="18" charset="0"/>
-              <a:ea typeface="+mn-ea"/>
-              <a:cs typeface="Times New Roman" panose="02020603050405020304" pitchFamily="18" charset="0"/>
-            </a:endParaRPr>
-          </a:p>
-          <a:p>
-            <a:pPr algn="just"/>
-            <a:r>
-              <a:rPr lang="zh-CN" altLang="en-US" sz="3000" b="1" dirty="0">
-                <a:solidFill>
-                  <a:srgbClr val="FF0000"/>
-                </a:solidFill>
-                <a:latin typeface="Times New Roman" panose="02020603050405020304" pitchFamily="18" charset="0"/>
-                <a:ea typeface="+mn-ea"/>
-                <a:cs typeface="Times New Roman" panose="02020603050405020304" pitchFamily="18" charset="0"/>
-              </a:rPr>
-              <a:t>实验内容及要求：</a:t>
-            </a:r>
-            <a:endParaRPr lang="en-US" altLang="zh-CN" sz="3000" b="1" dirty="0">
-              <a:solidFill>
-                <a:srgbClr val="FF0000"/>
-              </a:solidFill>
-              <a:latin typeface="Times New Roman" panose="02020603050405020304" pitchFamily="18" charset="0"/>
-              <a:ea typeface="+mn-ea"/>
-              <a:cs typeface="Times New Roman" panose="02020603050405020304" pitchFamily="18" charset="0"/>
-            </a:endParaRPr>
-          </a:p>
-          <a:p>
-            <a:pPr algn="just"/>
-            <a:r>
-              <a:rPr lang="zh-CN" altLang="en-US" sz="2600" dirty="0">
-                <a:solidFill>
-                  <a:schemeClr val="bg2"/>
-                </a:solidFill>
-                <a:latin typeface="Times New Roman" panose="02020603050405020304" pitchFamily="18" charset="0"/>
-                <a:ea typeface="+mn-ea"/>
-                <a:cs typeface="Times New Roman" panose="02020603050405020304" pitchFamily="18" charset="0"/>
-              </a:rPr>
-              <a:t>（</a:t>
-            </a:r>
-            <a:r>
-              <a:rPr lang="en-US" altLang="zh-CN" sz="2600" dirty="0">
-                <a:solidFill>
-                  <a:schemeClr val="bg2"/>
-                </a:solidFill>
-                <a:latin typeface="Times New Roman" panose="02020603050405020304" pitchFamily="18" charset="0"/>
-                <a:ea typeface="+mn-ea"/>
-                <a:cs typeface="Times New Roman" panose="02020603050405020304" pitchFamily="18" charset="0"/>
-              </a:rPr>
-              <a:t>1</a:t>
-            </a:r>
-            <a:r>
-              <a:rPr lang="zh-CN" altLang="en-US" sz="2600" dirty="0">
-                <a:solidFill>
-                  <a:schemeClr val="bg2"/>
-                </a:solidFill>
-                <a:latin typeface="Times New Roman" panose="02020603050405020304" pitchFamily="18" charset="0"/>
-                <a:ea typeface="+mn-ea"/>
-                <a:cs typeface="Times New Roman" panose="02020603050405020304" pitchFamily="18" charset="0"/>
-              </a:rPr>
-              <a:t>）设计以下函数：</a:t>
-            </a:r>
-            <a:r>
-              <a:rPr lang="en-US" altLang="zh-CN" sz="2600" dirty="0">
-                <a:solidFill>
-                  <a:schemeClr val="bg2"/>
-                </a:solidFill>
-                <a:latin typeface="Times New Roman" panose="02020603050405020304" pitchFamily="18" charset="0"/>
-                <a:cs typeface="Times New Roman" panose="02020603050405020304" pitchFamily="18" charset="0"/>
-              </a:rPr>
-              <a:t>(a) </a:t>
-            </a:r>
-            <a:r>
-              <a:rPr lang="zh-CN" altLang="en-US" sz="2600" dirty="0">
-                <a:solidFill>
-                  <a:schemeClr val="bg2"/>
-                </a:solidFill>
-                <a:latin typeface="Times New Roman" panose="02020603050405020304" pitchFamily="18" charset="0"/>
-                <a:ea typeface="+mn-ea"/>
-                <a:cs typeface="Times New Roman" panose="02020603050405020304" pitchFamily="18" charset="0"/>
-              </a:rPr>
-              <a:t>查询家乡为某省同学的人数</a:t>
-            </a:r>
-            <a:r>
-              <a:rPr lang="en-US" altLang="zh-CN" sz="2600" dirty="0">
-                <a:solidFill>
-                  <a:schemeClr val="bg2"/>
-                </a:solidFill>
-                <a:latin typeface="Times New Roman" panose="02020603050405020304" pitchFamily="18" charset="0"/>
-                <a:ea typeface="+mn-ea"/>
-                <a:cs typeface="Times New Roman" panose="02020603050405020304" pitchFamily="18" charset="0"/>
-              </a:rPr>
-              <a:t>,</a:t>
-            </a:r>
-            <a:r>
-              <a:rPr lang="en-US" altLang="zh-CN" sz="2600" dirty="0">
-                <a:solidFill>
-                  <a:schemeClr val="bg2"/>
-                </a:solidFill>
-                <a:latin typeface="Times New Roman" panose="02020603050405020304" pitchFamily="18" charset="0"/>
-                <a:cs typeface="Times New Roman" panose="02020603050405020304" pitchFamily="18" charset="0"/>
-              </a:rPr>
-              <a:t> (</a:t>
-            </a:r>
-            <a:r>
-              <a:rPr lang="en-US" altLang="zh-CN" sz="2600" dirty="0">
-                <a:solidFill>
-                  <a:prstClr val="black"/>
-                </a:solidFill>
-                <a:latin typeface="Times New Roman" panose="02020603050405020304" pitchFamily="18" charset="0"/>
-                <a:ea typeface="微软雅黑"/>
-                <a:cs typeface="Times New Roman" panose="02020603050405020304" pitchFamily="18" charset="0"/>
-              </a:rPr>
-              <a:t>b</a:t>
-            </a:r>
-            <a:r>
-              <a:rPr lang="en-US" altLang="zh-CN" sz="2600" dirty="0">
-                <a:solidFill>
-                  <a:schemeClr val="bg2"/>
-                </a:solidFill>
-                <a:latin typeface="Times New Roman" panose="02020603050405020304" pitchFamily="18" charset="0"/>
-                <a:cs typeface="Times New Roman" panose="02020603050405020304" pitchFamily="18" charset="0"/>
-              </a:rPr>
-              <a:t>) </a:t>
-            </a:r>
-            <a:r>
-              <a:rPr lang="zh-CN" altLang="en-US" sz="2600" dirty="0">
-                <a:solidFill>
-                  <a:schemeClr val="bg2"/>
-                </a:solidFill>
-                <a:latin typeface="Times New Roman" panose="02020603050405020304" pitchFamily="18" charset="0"/>
-                <a:ea typeface="+mn-ea"/>
-                <a:cs typeface="Times New Roman" panose="02020603050405020304" pitchFamily="18" charset="0"/>
-              </a:rPr>
-              <a:t>查询家乡为某省的同学姓名，</a:t>
-            </a:r>
-            <a:r>
-              <a:rPr lang="en-US" altLang="zh-CN" sz="2600" dirty="0">
-                <a:solidFill>
-                  <a:prstClr val="black"/>
-                </a:solidFill>
-                <a:latin typeface="Times New Roman" panose="02020603050405020304" pitchFamily="18" charset="0"/>
-                <a:ea typeface="微软雅黑"/>
-                <a:cs typeface="Times New Roman" panose="02020603050405020304" pitchFamily="18" charset="0"/>
-              </a:rPr>
-              <a:t>(c) </a:t>
-            </a:r>
-            <a:r>
-              <a:rPr lang="zh-CN" altLang="en-US" sz="2600" dirty="0">
-                <a:solidFill>
-                  <a:schemeClr val="bg2"/>
-                </a:solidFill>
-                <a:latin typeface="Times New Roman" panose="02020603050405020304" pitchFamily="18" charset="0"/>
-                <a:ea typeface="+mn-ea"/>
-                <a:cs typeface="Times New Roman" panose="02020603050405020304" pitchFamily="18" charset="0"/>
-              </a:rPr>
-              <a:t>统计一批同学中不同家乡省份的数量，</a:t>
-            </a:r>
-            <a:r>
-              <a:rPr lang="en-US" altLang="zh-CN" sz="2600" dirty="0">
-                <a:solidFill>
-                  <a:prstClr val="black"/>
-                </a:solidFill>
-                <a:latin typeface="Times New Roman" panose="02020603050405020304" pitchFamily="18" charset="0"/>
-                <a:ea typeface="微软雅黑"/>
-                <a:cs typeface="Times New Roman" panose="02020603050405020304" pitchFamily="18" charset="0"/>
-              </a:rPr>
-              <a:t>(d) </a:t>
-            </a:r>
-            <a:r>
-              <a:rPr lang="zh-CN" altLang="en-US" sz="2600" dirty="0">
-                <a:solidFill>
-                  <a:schemeClr val="bg2"/>
-                </a:solidFill>
-                <a:latin typeface="Times New Roman" panose="02020603050405020304" pitchFamily="18" charset="0"/>
-                <a:ea typeface="+mn-ea"/>
-                <a:cs typeface="Times New Roman" panose="02020603050405020304" pitchFamily="18" charset="0"/>
-              </a:rPr>
-              <a:t>统计一批同学中不同家乡城市的数量。</a:t>
-            </a:r>
-            <a:endParaRPr lang="en-US" altLang="zh-CN" sz="2600" dirty="0">
-              <a:solidFill>
-                <a:schemeClr val="bg2"/>
-              </a:solidFill>
-              <a:latin typeface="Times New Roman" panose="02020603050405020304" pitchFamily="18" charset="0"/>
-              <a:ea typeface="+mn-ea"/>
-              <a:cs typeface="Times New Roman" panose="02020603050405020304" pitchFamily="18" charset="0"/>
-            </a:endParaRPr>
-          </a:p>
-          <a:p>
-            <a:pPr algn="just"/>
-            <a:r>
-              <a:rPr lang="zh-CN" altLang="en-US" sz="2600" dirty="0">
-                <a:solidFill>
-                  <a:schemeClr val="bg2"/>
-                </a:solidFill>
-                <a:latin typeface="Times New Roman" panose="02020603050405020304" pitchFamily="18" charset="0"/>
-                <a:ea typeface="+mn-ea"/>
-                <a:cs typeface="Times New Roman" panose="02020603050405020304" pitchFamily="18" charset="0"/>
-              </a:rPr>
-              <a:t>（</a:t>
-            </a:r>
-            <a:r>
-              <a:rPr lang="en-US" altLang="zh-CN" sz="2600" dirty="0">
-                <a:solidFill>
-                  <a:schemeClr val="bg2"/>
-                </a:solidFill>
-                <a:latin typeface="Times New Roman" panose="02020603050405020304" pitchFamily="18" charset="0"/>
-                <a:ea typeface="+mn-ea"/>
-                <a:cs typeface="Times New Roman" panose="02020603050405020304" pitchFamily="18" charset="0"/>
-              </a:rPr>
-              <a:t>2</a:t>
-            </a:r>
-            <a:r>
-              <a:rPr lang="zh-CN" altLang="en-US" sz="2600" dirty="0">
-                <a:solidFill>
-                  <a:schemeClr val="bg2"/>
-                </a:solidFill>
-                <a:latin typeface="Times New Roman" panose="02020603050405020304" pitchFamily="18" charset="0"/>
-                <a:ea typeface="+mn-ea"/>
-                <a:cs typeface="Times New Roman" panose="02020603050405020304" pitchFamily="18" charset="0"/>
-              </a:rPr>
-              <a:t>）将</a:t>
-            </a:r>
-            <a:r>
-              <a:rPr lang="en-US" altLang="zh-CN" sz="2600" dirty="0">
-                <a:solidFill>
-                  <a:schemeClr val="bg2"/>
-                </a:solidFill>
-                <a:latin typeface="Times New Roman" panose="02020603050405020304" pitchFamily="18" charset="0"/>
-                <a:ea typeface="+mn-ea"/>
-                <a:cs typeface="Times New Roman" panose="02020603050405020304" pitchFamily="18" charset="0"/>
-              </a:rPr>
-              <a:t>(</a:t>
-            </a:r>
-            <a:r>
-              <a:rPr lang="en-US" altLang="zh-CN" sz="2600" dirty="0">
-                <a:solidFill>
-                  <a:schemeClr val="bg2"/>
-                </a:solidFill>
-                <a:latin typeface="Times New Roman" panose="02020603050405020304" pitchFamily="18" charset="0"/>
-                <a:cs typeface="Times New Roman" panose="02020603050405020304" pitchFamily="18" charset="0"/>
-              </a:rPr>
-              <a:t>a</a:t>
-            </a:r>
-            <a:r>
-              <a:rPr lang="en-US" altLang="zh-CN" sz="2600" dirty="0">
-                <a:solidFill>
-                  <a:schemeClr val="bg2"/>
-                </a:solidFill>
-                <a:latin typeface="Times New Roman" panose="02020603050405020304" pitchFamily="18" charset="0"/>
-                <a:ea typeface="+mn-ea"/>
-                <a:cs typeface="Times New Roman" panose="02020603050405020304" pitchFamily="18" charset="0"/>
-              </a:rPr>
-              <a:t>)(</a:t>
-            </a:r>
-            <a:r>
-              <a:rPr lang="en-US" altLang="zh-CN" sz="2600" dirty="0">
-                <a:solidFill>
-                  <a:prstClr val="black"/>
-                </a:solidFill>
-                <a:latin typeface="Times New Roman" panose="02020603050405020304" pitchFamily="18" charset="0"/>
-                <a:ea typeface="微软雅黑"/>
-                <a:cs typeface="Times New Roman" panose="02020603050405020304" pitchFamily="18" charset="0"/>
-              </a:rPr>
-              <a:t>b</a:t>
-            </a:r>
-            <a:r>
-              <a:rPr lang="en-US" altLang="zh-CN" sz="2600" dirty="0">
-                <a:solidFill>
-                  <a:schemeClr val="bg2"/>
-                </a:solidFill>
-                <a:latin typeface="Times New Roman" panose="02020603050405020304" pitchFamily="18" charset="0"/>
-                <a:ea typeface="+mn-ea"/>
-                <a:cs typeface="Times New Roman" panose="02020603050405020304" pitchFamily="18" charset="0"/>
-              </a:rPr>
-              <a:t>)</a:t>
-            </a:r>
-            <a:r>
-              <a:rPr kumimoji="0" lang="zh-CN" altLang="en-US" sz="2600" b="0" i="0" u="none" strike="noStrike" kern="1200" cap="none" spc="0" normalizeH="0" baseline="0" noProof="0" dirty="0">
-                <a:ln>
-                  <a:noFill/>
-                </a:ln>
-                <a:solidFill>
-                  <a:prstClr val="black"/>
-                </a:solidFill>
-                <a:effectLst/>
-                <a:uLnTx/>
-                <a:uFillTx/>
-                <a:latin typeface="Times New Roman" panose="02020603050405020304" pitchFamily="18" charset="0"/>
-                <a:ea typeface="微软雅黑"/>
-                <a:cs typeface="Times New Roman" panose="02020603050405020304" pitchFamily="18" charset="0"/>
-              </a:rPr>
-              <a:t>函数</a:t>
-            </a:r>
-            <a:r>
-              <a:rPr lang="zh-CN" altLang="en-US" sz="2600" dirty="0">
-                <a:solidFill>
-                  <a:prstClr val="black"/>
-                </a:solidFill>
-                <a:latin typeface="Times New Roman" panose="02020603050405020304" pitchFamily="18" charset="0"/>
-                <a:ea typeface="微软雅黑"/>
-                <a:cs typeface="Times New Roman" panose="02020603050405020304" pitchFamily="18" charset="0"/>
-              </a:rPr>
-              <a:t>保存到模块</a:t>
-            </a:r>
-            <a:r>
-              <a:rPr kumimoji="0" lang="en-US" altLang="zh-CN" sz="2600" b="0" i="0" u="none" strike="noStrike" kern="1200" cap="none" spc="0" normalizeH="0" baseline="0" noProof="0" dirty="0">
-                <a:ln>
-                  <a:noFill/>
-                </a:ln>
-                <a:solidFill>
-                  <a:prstClr val="black"/>
-                </a:solidFill>
-                <a:effectLst/>
-                <a:uLnTx/>
-                <a:uFillTx/>
-                <a:latin typeface="Times New Roman" panose="02020603050405020304" pitchFamily="18" charset="0"/>
-                <a:ea typeface="微软雅黑"/>
-                <a:cs typeface="Times New Roman" panose="02020603050405020304" pitchFamily="18" charset="0"/>
-              </a:rPr>
-              <a:t>module1.py</a:t>
-            </a:r>
-            <a:r>
-              <a:rPr kumimoji="0" lang="zh-CN" altLang="en-US" sz="2600" b="0" i="0" u="none" strike="noStrike" kern="1200" cap="none" spc="0" normalizeH="0" baseline="0" noProof="0" dirty="0">
-                <a:ln>
-                  <a:noFill/>
-                </a:ln>
-                <a:solidFill>
-                  <a:prstClr val="black"/>
-                </a:solidFill>
-                <a:effectLst/>
-                <a:uLnTx/>
-                <a:uFillTx/>
-                <a:latin typeface="Times New Roman" panose="02020603050405020304" pitchFamily="18" charset="0"/>
-                <a:ea typeface="微软雅黑"/>
-                <a:cs typeface="Times New Roman" panose="02020603050405020304" pitchFamily="18" charset="0"/>
-              </a:rPr>
-              <a:t>，</a:t>
-            </a:r>
-            <a:r>
-              <a:rPr kumimoji="0" lang="en-US" altLang="zh-CN" sz="2600" b="0" i="0" u="none" strike="noStrike" kern="1200" cap="none" spc="0" normalizeH="0" baseline="0" noProof="0" dirty="0">
-                <a:ln>
-                  <a:noFill/>
-                </a:ln>
-                <a:solidFill>
-                  <a:prstClr val="black"/>
-                </a:solidFill>
-                <a:effectLst/>
-                <a:uLnTx/>
-                <a:uFillTx/>
-                <a:latin typeface="Times New Roman" panose="02020603050405020304" pitchFamily="18" charset="0"/>
-                <a:ea typeface="微软雅黑"/>
-                <a:cs typeface="Times New Roman" panose="02020603050405020304" pitchFamily="18" charset="0"/>
-              </a:rPr>
-              <a:t>(c)(d)</a:t>
-            </a:r>
-            <a:r>
-              <a:rPr kumimoji="0" lang="zh-CN" altLang="en-US" sz="2600" b="0" i="0" u="none" strike="noStrike" kern="1200" cap="none" spc="0" normalizeH="0" baseline="0" noProof="0" dirty="0">
-                <a:ln>
-                  <a:noFill/>
-                </a:ln>
-                <a:solidFill>
-                  <a:prstClr val="black"/>
-                </a:solidFill>
-                <a:effectLst/>
-                <a:uLnTx/>
-                <a:uFillTx/>
-                <a:latin typeface="Times New Roman" panose="02020603050405020304" pitchFamily="18" charset="0"/>
-                <a:ea typeface="微软雅黑"/>
-                <a:cs typeface="Times New Roman" panose="02020603050405020304" pitchFamily="18" charset="0"/>
-              </a:rPr>
-              <a:t> 函数保存到模块</a:t>
-            </a:r>
-            <a:r>
-              <a:rPr kumimoji="0" lang="en-US" altLang="zh-CN" sz="2600" b="0" i="0" u="none" strike="noStrike" kern="1200" cap="none" spc="0" normalizeH="0" baseline="0" noProof="0" dirty="0">
-                <a:ln>
-                  <a:noFill/>
-                </a:ln>
-                <a:solidFill>
-                  <a:prstClr val="black"/>
-                </a:solidFill>
-                <a:effectLst/>
-                <a:uLnTx/>
-                <a:uFillTx/>
-                <a:latin typeface="Times New Roman" panose="02020603050405020304" pitchFamily="18" charset="0"/>
-                <a:ea typeface="微软雅黑"/>
-                <a:cs typeface="Times New Roman" panose="02020603050405020304" pitchFamily="18" charset="0"/>
-              </a:rPr>
-              <a:t>module2.py.</a:t>
-            </a:r>
-          </a:p>
-          <a:p>
-            <a:pPr algn="just"/>
-            <a:r>
-              <a:rPr lang="zh-CN" altLang="en-US" sz="2600" dirty="0">
-                <a:solidFill>
-                  <a:prstClr val="black"/>
-                </a:solidFill>
-                <a:latin typeface="Times New Roman" panose="02020603050405020304" pitchFamily="18" charset="0"/>
-                <a:ea typeface="微软雅黑"/>
-                <a:cs typeface="Times New Roman" panose="02020603050405020304" pitchFamily="18" charset="0"/>
-              </a:rPr>
-              <a:t>（</a:t>
-            </a:r>
-            <a:r>
-              <a:rPr lang="en-US" altLang="zh-CN" sz="2600" dirty="0">
-                <a:solidFill>
-                  <a:prstClr val="black"/>
-                </a:solidFill>
-                <a:latin typeface="Times New Roman" panose="02020603050405020304" pitchFamily="18" charset="0"/>
-                <a:ea typeface="微软雅黑"/>
-                <a:cs typeface="Times New Roman" panose="02020603050405020304" pitchFamily="18" charset="0"/>
-              </a:rPr>
-              <a:t>3</a:t>
-            </a:r>
-            <a:r>
-              <a:rPr lang="zh-CN" altLang="en-US" sz="2600" dirty="0">
-                <a:solidFill>
-                  <a:prstClr val="black"/>
-                </a:solidFill>
-                <a:latin typeface="Times New Roman" panose="02020603050405020304" pitchFamily="18" charset="0"/>
-                <a:ea typeface="微软雅黑"/>
-                <a:cs typeface="Times New Roman" panose="02020603050405020304" pitchFamily="18" charset="0"/>
-              </a:rPr>
-              <a:t>）将</a:t>
-            </a:r>
-            <a:r>
-              <a:rPr lang="en-US" altLang="zh-CN" sz="2600" dirty="0">
-                <a:solidFill>
-                  <a:prstClr val="black"/>
-                </a:solidFill>
-                <a:latin typeface="Times New Roman" panose="02020603050405020304" pitchFamily="18" charset="0"/>
-                <a:ea typeface="微软雅黑"/>
-                <a:cs typeface="Times New Roman" panose="02020603050405020304" pitchFamily="18" charset="0"/>
-              </a:rPr>
-              <a:t>module1.py</a:t>
-            </a:r>
-            <a:r>
-              <a:rPr lang="zh-CN" altLang="en-US" sz="2600" dirty="0">
-                <a:solidFill>
-                  <a:prstClr val="black"/>
-                </a:solidFill>
-                <a:latin typeface="Times New Roman" panose="02020603050405020304" pitchFamily="18" charset="0"/>
-                <a:ea typeface="微软雅黑"/>
-                <a:cs typeface="Times New Roman" panose="02020603050405020304" pitchFamily="18" charset="0"/>
-              </a:rPr>
-              <a:t>和</a:t>
-            </a:r>
-            <a:r>
-              <a:rPr lang="en-US" altLang="zh-CN" sz="2600" dirty="0">
-                <a:solidFill>
-                  <a:prstClr val="black"/>
-                </a:solidFill>
-                <a:latin typeface="Times New Roman" panose="02020603050405020304" pitchFamily="18" charset="0"/>
-                <a:ea typeface="微软雅黑"/>
-                <a:cs typeface="Times New Roman" panose="02020603050405020304" pitchFamily="18" charset="0"/>
-              </a:rPr>
-              <a:t>module2.py</a:t>
-            </a:r>
-            <a:r>
-              <a:rPr lang="zh-CN" altLang="en-US" sz="2600" dirty="0">
-                <a:solidFill>
-                  <a:prstClr val="black"/>
-                </a:solidFill>
-                <a:latin typeface="Times New Roman" panose="02020603050405020304" pitchFamily="18" charset="0"/>
-                <a:ea typeface="微软雅黑"/>
-                <a:cs typeface="Times New Roman" panose="02020603050405020304" pitchFamily="18" charset="0"/>
-              </a:rPr>
-              <a:t>保存到一个包中。代码演示通过包的导入使用</a:t>
-            </a:r>
-            <a:r>
-              <a:rPr lang="en-US" altLang="zh-CN" sz="2600" dirty="0">
-                <a:solidFill>
-                  <a:prstClr val="black"/>
-                </a:solidFill>
-                <a:latin typeface="Times New Roman" panose="02020603050405020304" pitchFamily="18" charset="0"/>
-                <a:ea typeface="微软雅黑"/>
-                <a:cs typeface="Times New Roman" panose="02020603050405020304" pitchFamily="18" charset="0"/>
-              </a:rPr>
-              <a:t>(a)(b)(c)(d)</a:t>
-            </a:r>
-            <a:r>
-              <a:rPr lang="zh-CN" altLang="en-US" sz="2600" dirty="0">
-                <a:solidFill>
-                  <a:prstClr val="black"/>
-                </a:solidFill>
-                <a:latin typeface="Times New Roman" panose="02020603050405020304" pitchFamily="18" charset="0"/>
-                <a:ea typeface="微软雅黑"/>
-                <a:cs typeface="Times New Roman" panose="02020603050405020304" pitchFamily="18" charset="0"/>
-              </a:rPr>
-              <a:t> </a:t>
-            </a:r>
-            <a:r>
-              <a:rPr lang="zh-CN" altLang="en-US" sz="2600">
-                <a:solidFill>
-                  <a:prstClr val="black"/>
-                </a:solidFill>
-                <a:latin typeface="Times New Roman" panose="02020603050405020304" pitchFamily="18" charset="0"/>
-                <a:ea typeface="微软雅黑"/>
-                <a:cs typeface="Times New Roman" panose="02020603050405020304" pitchFamily="18" charset="0"/>
-              </a:rPr>
-              <a:t>函数。</a:t>
-            </a:r>
-            <a:endParaRPr lang="en-US" altLang="zh-CN" sz="2600" dirty="0">
-              <a:solidFill>
-                <a:schemeClr val="bg2"/>
-              </a:solidFill>
-              <a:latin typeface="Times New Roman" panose="02020603050405020304" pitchFamily="18" charset="0"/>
-              <a:ea typeface="+mn-ea"/>
-              <a:cs typeface="Times New Roman" panose="02020603050405020304" pitchFamily="18" charset="0"/>
-            </a:endParaRPr>
-          </a:p>
-        </p:txBody>
-      </p:sp>
-    </p:spTree>
-    <p:extLst>
-      <p:ext uri="{BB962C8B-B14F-4D97-AF65-F5344CB8AC3E}">
-        <p14:creationId xmlns:p14="http://schemas.microsoft.com/office/powerpoint/2010/main" val="4207004688"/>
-      </p:ext>
-    </p:extLst>
-  </p:cSld>
-  <p:clrMapOvr>
-    <a:masterClrMapping/>
-  </p:clrMapOvr>
-  <p:transition>
-    <p:fade/>
-  </p:transition>
-</p:sld>
-</file>
-
-<file path=ppt/slides/slide26.xml><?xml version="1.0" encoding="utf-8"?>
-<p:sld xmlns:a="http://schemas.openxmlformats.org/drawingml/2006/main" xmlns:r="http://schemas.openxmlformats.org/officeDocument/2006/relationships" xmlns:p="http://schemas.openxmlformats.org/presentationml/2006/main">
-  <p:cSld>
-    <p:spTree>
-      <p:nvGrpSpPr>
         <p:cNvPr id="1" name="">
           <a:extLst>
             <a:ext uri="{FF2B5EF4-FFF2-40B4-BE49-F238E27FC236}">
-              <a16:creationId xmlns:a16="http://schemas.microsoft.com/office/drawing/2014/main" id="{866629C2-4A0E-00DA-0529-323788B074D1}"/>
+              <a16:creationId xmlns:a16="http://schemas.microsoft.com/office/drawing/2014/main" id="{9372868A-4E3E-E301-9DEE-1A6CD60DC6A8}"/>
             </a:ext>
           </a:extLst>
         </p:cNvPr>
@@ -22294,7 +21481,7 @@
           <p:cNvPr id="3" name="标题 2">
             <a:extLst>
               <a:ext uri="{FF2B5EF4-FFF2-40B4-BE49-F238E27FC236}">
-                <a16:creationId xmlns:a16="http://schemas.microsoft.com/office/drawing/2014/main" id="{965D7809-32B9-73D0-DAA2-E70DB954D296}"/>
+                <a16:creationId xmlns:a16="http://schemas.microsoft.com/office/drawing/2014/main" id="{0EAE4071-7356-D467-B1BA-85E33B81119F}"/>
               </a:ext>
             </a:extLst>
           </p:cNvPr>
@@ -22325,7 +21512,7 @@
               <a:rPr lang="en-US" altLang="zh-CN" sz="4000" dirty="0">
                 <a:latin typeface="+mn-ea"/>
               </a:rPr>
-              <a:t>4</a:t>
+              <a:t>2</a:t>
             </a:r>
             <a:r>
               <a:rPr lang="zh-CN" altLang="en-US" sz="4000" dirty="0">
@@ -22342,7 +21529,7 @@
           <p:cNvPr id="4" name="TextBox 10">
             <a:extLst>
               <a:ext uri="{FF2B5EF4-FFF2-40B4-BE49-F238E27FC236}">
-                <a16:creationId xmlns:a16="http://schemas.microsoft.com/office/drawing/2014/main" id="{8F3DC74A-684F-BCDC-C414-D34B1CD8DA72}"/>
+                <a16:creationId xmlns:a16="http://schemas.microsoft.com/office/drawing/2014/main" id="{76081A6E-C1B9-E5FC-0B8E-242B76BB572E}"/>
               </a:ext>
             </a:extLst>
           </p:cNvPr>
@@ -22388,7 +21575,7 @@
                 <a:latin typeface="+mn-ea"/>
                 <a:ea typeface="+mn-ea"/>
               </a:rPr>
-              <a:t>2-Python</a:t>
+              <a:t>-Python</a:t>
             </a:r>
             <a:r>
               <a:rPr lang="zh-CN" altLang="en-US" sz="3200" b="1" dirty="0">
@@ -22415,7 +21602,7 @@
           <p:cNvPr id="6" name="TextBox 12">
             <a:extLst>
               <a:ext uri="{FF2B5EF4-FFF2-40B4-BE49-F238E27FC236}">
-                <a16:creationId xmlns:a16="http://schemas.microsoft.com/office/drawing/2014/main" id="{F9F7A302-D1A1-746F-E50F-0B2CEC6C7883}"/>
+                <a16:creationId xmlns:a16="http://schemas.microsoft.com/office/drawing/2014/main" id="{B20AB3E1-5690-8FD5-1209-E8C62A18C7FC}"/>
               </a:ext>
             </a:extLst>
           </p:cNvPr>
@@ -22424,8 +21611,8 @@
         </p:nvSpPr>
         <p:spPr>
           <a:xfrm>
-            <a:off x="486228" y="1819305"/>
-            <a:ext cx="11226801" cy="3693319"/>
+            <a:off x="486228" y="1761249"/>
+            <a:ext cx="11226801" cy="4971169"/>
           </a:xfrm>
           <a:prstGeom prst="rect">
             <a:avLst/>
@@ -22438,7 +21625,11 @@
           </a:bodyPr>
           <a:lstStyle/>
           <a:p>
-            <a:pPr algn="just"/>
+            <a:pPr algn="just">
+              <a:lnSpc>
+                <a:spcPct val="150000"/>
+              </a:lnSpc>
+            </a:pPr>
             <a:r>
               <a:rPr lang="zh-CN" altLang="en-US" sz="3200" b="1" dirty="0">
                 <a:solidFill>
@@ -22460,7 +21651,11 @@
             </a:endParaRPr>
           </a:p>
           <a:p>
-            <a:pPr algn="just"/>
+            <a:pPr algn="just">
+              <a:lnSpc>
+                <a:spcPct val="150000"/>
+              </a:lnSpc>
+            </a:pPr>
             <a:r>
               <a:rPr lang="zh-CN" altLang="en-US" sz="2800" dirty="0">
                 <a:solidFill>
@@ -22504,7 +21699,11 @@
             </a:endParaRPr>
           </a:p>
           <a:p>
-            <a:pPr algn="just"/>
+            <a:pPr algn="just">
+              <a:lnSpc>
+                <a:spcPct val="150000"/>
+              </a:lnSpc>
+            </a:pPr>
             <a:r>
               <a:rPr lang="zh-CN" altLang="en-US" sz="3200" b="1" dirty="0">
                 <a:solidFill>
@@ -22526,7 +21725,11 @@
             </a:endParaRPr>
           </a:p>
           <a:p>
-            <a:pPr algn="just"/>
+            <a:pPr algn="just">
+              <a:lnSpc>
+                <a:spcPct val="150000"/>
+              </a:lnSpc>
+            </a:pPr>
             <a:r>
               <a:rPr lang="zh-CN" altLang="en-US" sz="2800" dirty="0">
                 <a:solidFill>
@@ -22592,7 +21795,11 @@
             </a:endParaRPr>
           </a:p>
           <a:p>
-            <a:pPr algn="just"/>
+            <a:pPr algn="just">
+              <a:lnSpc>
+                <a:spcPct val="150000"/>
+              </a:lnSpc>
+            </a:pPr>
             <a:r>
               <a:rPr lang="zh-CN" altLang="en-US" sz="2800" dirty="0">
                 <a:solidFill>
@@ -22728,7 +21935,7 @@
     </p:spTree>
     <p:extLst>
       <p:ext uri="{BB962C8B-B14F-4D97-AF65-F5344CB8AC3E}">
-        <p14:creationId xmlns:p14="http://schemas.microsoft.com/office/powerpoint/2010/main" val="2062764192"/>
+        <p14:creationId xmlns:p14="http://schemas.microsoft.com/office/powerpoint/2010/main" val="2426487003"/>
       </p:ext>
     </p:extLst>
   </p:cSld>
